--- a/Diploma Bitcoin/Capítulo 8 — Rede Lightning - Usar bitcoin no dia a dia/DB 2025 Capítulo 8 — Sessão prática.pptx
+++ b/Diploma Bitcoin/Capítulo 8 — Rede Lightning - Usar bitcoin no dia a dia/DB 2025 Capítulo 8 — Sessão prática.pptx
@@ -133,7 +133,7 @@
           <a:p>
             <a:fld id="{2D806190-753F-B441-B6BD-4CD1B6C676A4}" type="datetimeFigureOut">
               <a:rPr lang="en-PT" smtClean="0"/>
-              <a:t>16/11/2025</a:t>
+              <a:t>17/04/2026</a:t>
             </a:fld>
             <a:endParaRPr lang="en-PT"/>
           </a:p>
@@ -6788,7 +6788,7 @@
                 <a:ea typeface="Open Sans"/>
                 <a:cs typeface="Open Sans"/>
               </a:rPr>
-              <a:t>Com a configuração base, é uma carteira </a:t>
+              <a:t>É uma carteira </a:t>
             </a:r>
             <a:r>
               <a:rPr lang="pt-PT" sz="3200" dirty="0" err="1">
@@ -6804,7 +6804,7 @@
                 <a:ea typeface="Open Sans"/>
                 <a:cs typeface="Open Sans"/>
               </a:rPr>
-              <a:t> </a:t>
+              <a:t> não-</a:t>
             </a:r>
             <a:r>
               <a:rPr lang="pt-PT" sz="3200" dirty="0" err="1">
@@ -6814,14 +6814,11 @@
               </a:rPr>
               <a:t>custodial</a:t>
             </a:r>
-            <a:r>
-              <a:rPr lang="pt-PT" sz="3200" dirty="0">
-                <a:latin typeface="Open Sans"/>
-                <a:ea typeface="Open Sans"/>
-                <a:cs typeface="Open Sans"/>
-              </a:rPr>
-              <a:t> – as chaves privadas pertencem à entidade terceira.</a:t>
-            </a:r>
+            <a:endParaRPr lang="pt-PT" sz="3200" dirty="0">
+              <a:latin typeface="Open Sans"/>
+              <a:ea typeface="Open Sans"/>
+              <a:cs typeface="Open Sans"/>
+            </a:endParaRPr>
           </a:p>
           <a:p>
             <a:pPr marL="571500" indent="-571500">
@@ -6836,23 +6833,7 @@
                 <a:ea typeface="Open Sans"/>
                 <a:cs typeface="Open Sans"/>
               </a:rPr>
-              <a:t>Existe uma versão não-</a:t>
-            </a:r>
-            <a:r>
-              <a:rPr lang="pt-PT" sz="3200" dirty="0" err="1">
-                <a:latin typeface="Open Sans"/>
-                <a:ea typeface="Open Sans"/>
-                <a:cs typeface="Open Sans"/>
-              </a:rPr>
-              <a:t>custodial</a:t>
-            </a:r>
-            <a:r>
-              <a:rPr lang="pt-PT" sz="3200" dirty="0">
-                <a:latin typeface="Open Sans"/>
-                <a:ea typeface="Open Sans"/>
-                <a:cs typeface="Open Sans"/>
-              </a:rPr>
-              <a:t> que se pode configurar na aplicação.</a:t>
+              <a:t>Pode ser feita uma cópia de segurança da chave privada</a:t>
             </a:r>
           </a:p>
         </p:txBody>
